--- a/家庭财务管理系统_开题报告.pptx
+++ b/家庭财务管理系统_开题报告.pptx
@@ -10152,7 +10152,7 @@
         <p:spPr>
           <a:xfrm>
             <a:off x="6400800" y="2011680"/>
-            <a:ext cx="5029200" cy="2743200"/>
+            <a:ext cx="5029200" cy="2385974"/>
           </a:xfrm>
           <a:prstGeom prst="rect">
             <a:avLst/>
@@ -10179,7 +10179,12 @@
               </a:defRPr>
             </a:pPr>
             <a:r>
-              <a:t>本系统以轻量化、实用化为核心理念，旨在：</a:t>
+              <a:rPr dirty="0" err="1"/>
+              <a:t>本系统以轻量化、实用化为核心理念，旨在</a:t>
+            </a:r>
+            <a:r>
+              <a:rPr dirty="0"/>
+              <a:t>：</a:t>
             </a:r>
           </a:p>
           <a:p>
@@ -10196,7 +10201,7 @@
                 </a:solidFill>
               </a:defRPr>
             </a:pPr>
-            <a:endParaRPr/>
+            <a:endParaRPr dirty="0"/>
           </a:p>
           <a:p>
             <a:pPr>
@@ -10213,8 +10218,14 @@
               </a:defRPr>
             </a:pPr>
             <a:r>
-              <a:t>- 降低家庭财务管理门槛，让普通家庭轻松上手</a:t>
-            </a:r>
+              <a:rPr dirty="0"/>
+              <a:t>- </a:t>
+            </a:r>
+            <a:r>
+              <a:rPr dirty="0" err="1"/>
+              <a:t>降低家庭财务管理门槛，让普通家庭轻松上手</a:t>
+            </a:r>
+            <a:endParaRPr dirty="0"/>
           </a:p>
           <a:p>
             <a:pPr>
@@ -10231,8 +10242,14 @@
               </a:defRPr>
             </a:pPr>
             <a:r>
-              <a:t>- 通过预算跟踪和账单提醒，帮助家庭实现理性消费</a:t>
-            </a:r>
+              <a:rPr dirty="0"/>
+              <a:t>- </a:t>
+            </a:r>
+            <a:r>
+              <a:rPr dirty="0" err="1"/>
+              <a:t>通过预算跟踪和账单提醒，帮助家庭实现理性消费</a:t>
+            </a:r>
+            <a:endParaRPr dirty="0"/>
           </a:p>
           <a:p>
             <a:pPr>
@@ -10249,8 +10266,14 @@
               </a:defRPr>
             </a:pPr>
             <a:r>
-              <a:t>- 支持家庭成员协同管理，提升家庭财务透明度</a:t>
-            </a:r>
+              <a:rPr dirty="0"/>
+              <a:t>- </a:t>
+            </a:r>
+            <a:r>
+              <a:rPr dirty="0" err="1"/>
+              <a:t>支持家庭成员协同管理，提升家庭财务透明度</a:t>
+            </a:r>
+            <a:endParaRPr dirty="0"/>
           </a:p>
           <a:p>
             <a:pPr>
@@ -10267,26 +10290,21 @@
               </a:defRPr>
             </a:pPr>
             <a:r>
-              <a:t>- 提供多维统计图表，辅助家庭做出更好的财务决策</a:t>
-            </a:r>
-          </a:p>
-          <a:p>
-            <a:pPr>
-              <a:lnSpc>
-                <a:spcPct val="140000"/>
-              </a:lnSpc>
-              <a:spcAft>
-                <a:spcPts val="800"/>
-              </a:spcAft>
-              <a:defRPr sz="1400">
-                <a:solidFill>
-                  <a:srgbClr val="333333"/>
-                </a:solidFill>
-              </a:defRPr>
-            </a:pPr>
-            <a:r>
-              <a:t>- 为软件工程实践教学提供完整的项目案例</a:t>
-            </a:r>
+              <a:rPr dirty="0"/>
+              <a:t>- </a:t>
+            </a:r>
+            <a:r>
+              <a:rPr dirty="0" err="1"/>
+              <a:t>提供多维统计图表</a:t>
+            </a:r>
+            <a:r>
+              <a:rPr err="1"/>
+              <a:t>，</a:t>
+            </a:r>
+            <a:r>
+              <a:t>辅助家庭做出更好的财务决策</a:t>
+            </a:r>
+            <a:endParaRPr dirty="0"/>
           </a:p>
         </p:txBody>
       </p:sp>
